--- a/corso/export/pptx/Addendum - Schede riassuntive.pptx
+++ b/corso/export/pptx/Addendum - Schede riassuntive.pptx
@@ -2564,7 +2564,7 @@
           <a:lstStyle/>
           <a:p>
             <a:r>
-              <a:t>Scheda della lezione 3. Esempi: 15 nodi per 45 minuti = 11,25 miglia (1.7.5-31); 18 miglia a 7 nodi = 2 h 34′ (1.7.5-65).</a:t>
+              <a:t>Scheda della lezione 3: ormeggi e ancoraggi, cartografia, fari e segnalamento AISM-IALA. Cardinali: N luce continua (scintillante), E 3 lampi, S 6 lampi più un lampo lungo, W 9 lampi.</a:t>
             </a:r>
           </a:p>
         </p:txBody>
@@ -2634,7 +2634,7 @@
           <a:lstStyle/>
           <a:p>
             <a:r>
-              <a:t>Scheda della lezione 3. Esempi: 15 nodi per 45 minuti = 11,25 miglia (1.7.5-31); 18 miglia a 7 nodi = 2 h 34′ (1.7.5-65).</a:t>
+              <a:t>Scheda della lezione 3: ormeggi e ancoraggi, cartografia, fari e segnalamento AISM-IALA. Cardinali: N luce continua (scintillante), E 3 lampi, S 6 lampi più un lampo lungo, W 9 lampi.</a:t>
             </a:r>
           </a:p>
         </p:txBody>
@@ -2704,7 +2704,7 @@
           <a:lstStyle/>
           <a:p>
             <a:r>
-              <a:t>Scheda della lezione 4. Quiz 1.4.3 (ancoraggio), 1.4.2 (distanze), 1.7.3 (bussola).</a:t>
+              <a:t>Scheda della lezione 4. Esempi: 15 nodi per 45 minuti = 15 × 45 : 60 = 11,25 miglia (1.7.5-31); 18 miglia a 7 nodi = 18 : 7 × 60 ≈ 154′ = 2 h 34′ (1.7.5-65). Quiz 1.7.4 (bussola), 1.7.5 (stima), 1.7.7 (prora e rotta), 1.2.3 (carburante), 1.4.2 (costa).</a:t>
             </a:r>
           </a:p>
         </p:txBody>
@@ -2774,7 +2774,7 @@
           <a:lstStyle/>
           <a:p>
             <a:r>
-              <a:t>Scheda della lezione 4. Quiz 1.4.3 (ancoraggio), 1.4.2 (distanze), 1.7.3 (bussola).</a:t>
+              <a:t>Scheda della lezione 4. Esempi: 15 nodi per 45 minuti = 15 × 45 : 60 = 11,25 miglia (1.7.5-31); 18 miglia a 7 nodi = 18 : 7 × 60 ≈ 154′ = 2 h 34′ (1.7.5-65). Quiz 1.7.4 (bussola), 1.7.5 (stima), 1.7.7 (prora e rotta), 1.2.3 (carburante), 1.4.2 (costa).</a:t>
             </a:r>
           </a:p>
         </p:txBody>

--- a/corso/export/pptx/Addendum - Schede riassuntive.pptx
+++ b/corso/export/pptx/Addendum - Schede riassuntive.pptx
@@ -604,7 +604,7 @@
           <a:lstStyle/>
           <a:p>
             <a:r>
-              <a:t>Scheda della lezione 5. GPS obbligatorio oltre 12 miglia. Tricolore in testa d'albero ammesso sotto i 20 m.</a:t>
+              <a:t>Scheda della lezione 5: fanali, segnali diurni, rischio di collisione e precedenze. Quiz 1.5.1 (fanali e segnali diurni) e 1.5.2 (prevenire gli abbordi).</a:t>
             </a:r>
           </a:p>
         </p:txBody>
@@ -674,7 +674,7 @@
           <a:lstStyle/>
           <a:p>
             <a:r>
-              <a:t>Scheda della lezione 5. GPS obbligatorio oltre 12 miglia. Tricolore in testa d'albero ammesso sotto i 20 m.</a:t>
+              <a:t>Scheda della lezione 5: fanali, segnali diurni, rischio di collisione e precedenze. Quiz 1.5.1 (fanali e segnali diurni) e 1.5.2 (prevenire gli abbordi).</a:t>
             </a:r>
           </a:p>
         </p:txBody>
@@ -2704,7 +2704,7 @@
           <a:lstStyle/>
           <a:p>
             <a:r>
-              <a:t>Scheda della lezione 4. Esempi: 15 nodi per 45 minuti = 15 × 45 : 60 = 11,25 miglia (1.7.5-31); 18 miglia a 7 nodi = 18 : 7 × 60 ≈ 154′ = 2 h 34′ (1.7.5-65). Quiz 1.7.4 (bussola), 1.7.5 (stima), 1.7.7 (prora e rotta), 1.2.3 (carburante), 1.4.2 (costa).</a:t>
+              <a:t>Scheda della lezione 4. Esempi: 15 nodi per 45 minuti = 15 × 45 : 60 = 11,25 miglia (1.7.5-31); 18 miglia a 7 nodi = 18 : 7 × 60 ≈ 154′ = 2 h 34′ (1.7.5-65). Quiz 1.7.4 (bussola), 1.7.5 (stima), 1.7.6 (navigazione costiera), 1.7.3 (GPS, obbligatorio oltre 12 miglia), 1.7.7 (prora e rotta), 1.2.3 (carburante), 1.4.2 (costa).</a:t>
             </a:r>
           </a:p>
         </p:txBody>
@@ -2774,7 +2774,7 @@
           <a:lstStyle/>
           <a:p>
             <a:r>
-              <a:t>Scheda della lezione 4. Esempi: 15 nodi per 45 minuti = 15 × 45 : 60 = 11,25 miglia (1.7.5-31); 18 miglia a 7 nodi = 18 : 7 × 60 ≈ 154′ = 2 h 34′ (1.7.5-65). Quiz 1.7.4 (bussola), 1.7.5 (stima), 1.7.7 (prora e rotta), 1.2.3 (carburante), 1.4.2 (costa).</a:t>
+              <a:t>Scheda della lezione 4. Esempi: 15 nodi per 45 minuti = 15 × 45 : 60 = 11,25 miglia (1.7.5-31); 18 miglia a 7 nodi = 18 : 7 × 60 ≈ 154′ = 2 h 34′ (1.7.5-65). Quiz 1.7.4 (bussola), 1.7.5 (stima), 1.7.6 (navigazione costiera), 1.7.3 (GPS, obbligatorio oltre 12 miglia), 1.7.7 (prora e rotta), 1.2.3 (carburante), 1.4.2 (costa).</a:t>
             </a:r>
           </a:p>
         </p:txBody>
